--- a/downloads/DCT_V1_Ch03_Slides.pptx
+++ b/downloads/DCT_V1_Ch03_Slides.pptx
@@ -128,7 +128,7 @@
   <p:extLst>
     <p:ext uri="{521415D9-36F7-43E2-AB2F-B90AF26B5E84}">
       <p14:sectionLst xmlns:p14="http://schemas.microsoft.com/office/powerpoint/2010/main">
-        <p14:section name="Opening" id="{4fbadf3e-344d-ae03-41ef-ac80037cc1c4}">
+        <p14:section name="Opening" id="{ec682204-4dd4-dbed-5d4f-4d346efd5364}">
           <p14:sldIdLst>
             <p14:sldId id="256"/>
             <p14:sldId id="257"/>
@@ -136,45 +136,45 @@
             <p14:sldId id="259"/>
           </p14:sldIdLst>
         </p14:section>
-        <p14:section name="3.1 Mathematical Language" id="{b3d32a93-e983-a417-9fe2-b887b6972022}">
+        <p14:section name="3.1 Mathematical Language" id="{8a0dd7e4-49af-6308-f445-4ab4dcdaa9ea}">
           <p14:sldIdLst>
             <p14:sldId id="260"/>
           </p14:sldIdLst>
         </p14:section>
-        <p14:section name="3.2 Mappings and Transformation Operators" id="{1680c4a1-c947-c5e3-d1c6-c4961c760609}">
+        <p14:section name="3.2 Mappings and Transformation Operators" id="{bd5757fd-d741-a620-dac4-f738efd4e0d5}">
           <p14:sldIdLst>
             <p14:sldId id="261"/>
           </p14:sldIdLst>
         </p14:section>
-        <p14:section name="3.3 Vectors, Units, and Meridian's Declared State" id="{bbcde280-6e38-8624-12fb-0e73f1191920}">
+        <p14:section name="3.3 Vectors, Units, and Meridian's Declared State" id="{81a6b5ef-bc50-c719-aa0e-3d0ab2481a8f}">
           <p14:sldIdLst>
             <p14:sldId id="262"/>
             <p14:sldId id="263"/>
           </p14:sldIdLst>
         </p14:section>
-        <p14:section name="3.4 Matrices and Linear Operators" id="{e295ba97-e424-50a5-dca7-99dc4cb4cd03}">
+        <p14:section name="3.4 Matrices and Linear Operators" id="{5818c84b-2296-2d30-8317-136e3d342858}">
           <p14:sldIdLst>
             <p14:sldId id="264"/>
           </p14:sldIdLst>
         </p14:section>
-        <p14:section name="3.5 Distances Between Company States" id="{83920995-5dcc-9e90-1209-19671f4b0f4e}">
+        <p14:section name="3.5 Distances Between Company States" id="{8fbfd393-e274-1513-be2b-005ab5d1609e}">
           <p14:sldIdLst>
             <p14:sldId id="265"/>
             <p14:sldId id="266"/>
             <p14:sldId id="267"/>
           </p14:sldIdLst>
         </p14:section>
-        <p14:section name="3.6 Enterprise State Spaces" id="{a7203bc6-58b9-270e-713f-d06af41145fc}">
+        <p14:section name="3.6 Enterprise State Spaces" id="{6fb67323-7212-08fd-f8d1-55b823a924b6}">
           <p14:sldIdLst>
             <p14:sldId id="268"/>
           </p14:sldIdLst>
         </p14:section>
-        <p14:section name="3.7 Deterministic and Stochastic Models" id="{62efe32b-1191-c00e-defd-0a3484bb6339}">
+        <p14:section name="3.7 Deterministic and Stochastic Models" id="{c387cb9b-80fe-b0df-c994-a86bdaf8108f}">
           <p14:sldIdLst>
             <p14:sldId id="269"/>
           </p14:sldIdLst>
         </p14:section>
-        <p14:section name="Worked Example 3.1" id="{d80915e2-2e53-0c36-4e24-f4901d5c78ee}">
+        <p14:section name="Worked Example 3.1" id="{1c4b2775-5f5c-0fd6-1719-10aee2c0a656}">
           <p14:sldIdLst>
             <p14:sldId id="270"/>
             <p14:sldId id="271"/>
@@ -182,12 +182,12 @@
             <p14:sldId id="273"/>
           </p14:sldIdLst>
         </p14:section>
-        <p14:section name="AXIOM Lab 1.3" id="{124c7dbf-1afd-1b19-1d98-de22dd5e1cf6}">
+        <p14:section name="AXIOM Lab 1.3" id="{566be247-ed0c-b5b7-e637-871cd2eabc29}">
           <p14:sldIdLst>
             <p14:sldId id="274"/>
           </p14:sldIdLst>
         </p14:section>
-        <p14:section name="Close" id="{bd0ac226-e0ad-8d38-2b75-dfd1e5a0ec7f}">
+        <p14:section name="Close" id="{d60fb5a5-e4fc-8a00-fe26-65af69e021bb}">
           <p14:sldIdLst>
             <p14:sldId id="275"/>
             <p14:sldId id="276"/>

--- a/downloads/DCT_V1_Ch03_Slides.pptx
+++ b/downloads/DCT_V1_Ch03_Slides.pptx
@@ -128,7 +128,7 @@
   <p:extLst>
     <p:ext uri="{521415D9-36F7-43E2-AB2F-B90AF26B5E84}">
       <p14:sectionLst xmlns:p14="http://schemas.microsoft.com/office/powerpoint/2010/main">
-        <p14:section name="Opening" id="{ec682204-4dd4-dbed-5d4f-4d346efd5364}">
+        <p14:section name="Opening" id="{5d2e9aa2-32a1-dae0-0c73-1dd3c97c92a0}">
           <p14:sldIdLst>
             <p14:sldId id="256"/>
             <p14:sldId id="257"/>
@@ -136,45 +136,45 @@
             <p14:sldId id="259"/>
           </p14:sldIdLst>
         </p14:section>
-        <p14:section name="3.1 Mathematical Language" id="{8a0dd7e4-49af-6308-f445-4ab4dcdaa9ea}">
+        <p14:section name="3.1 Mathematical Language" id="{f3ffc8e4-1eea-c118-d9ca-b41ec0d4ac8d}">
           <p14:sldIdLst>
             <p14:sldId id="260"/>
           </p14:sldIdLst>
         </p14:section>
-        <p14:section name="3.2 Mappings and Transformation Operators" id="{bd5757fd-d741-a620-dac4-f738efd4e0d5}">
+        <p14:section name="3.2 Mappings and Transformation Operators" id="{c10dbda4-0a5e-eff9-d4fb-67895f48cab8}">
           <p14:sldIdLst>
             <p14:sldId id="261"/>
           </p14:sldIdLst>
         </p14:section>
-        <p14:section name="3.3 Vectors, Units, and Meridian's Declared State" id="{81a6b5ef-bc50-c719-aa0e-3d0ab2481a8f}">
+        <p14:section name="3.3 Vectors, Units, and Meridian's Declared State" id="{91f5b90d-529f-c264-fa64-aed8382a43f9}">
           <p14:sldIdLst>
             <p14:sldId id="262"/>
             <p14:sldId id="263"/>
           </p14:sldIdLst>
         </p14:section>
-        <p14:section name="3.4 Matrices and Linear Operators" id="{5818c84b-2296-2d30-8317-136e3d342858}">
+        <p14:section name="3.4 Matrices and Linear Operators" id="{8e6784ec-bd1f-9d6d-852d-59320803aee8}">
           <p14:sldIdLst>
             <p14:sldId id="264"/>
           </p14:sldIdLst>
         </p14:section>
-        <p14:section name="3.5 Distances Between Company States" id="{8fbfd393-e274-1513-be2b-005ab5d1609e}">
+        <p14:section name="3.5 Distances Between Company States" id="{94f26cff-bd50-6cce-06f7-fc775f261172}">
           <p14:sldIdLst>
             <p14:sldId id="265"/>
             <p14:sldId id="266"/>
             <p14:sldId id="267"/>
           </p14:sldIdLst>
         </p14:section>
-        <p14:section name="3.6 Enterprise State Spaces" id="{6fb67323-7212-08fd-f8d1-55b823a924b6}">
+        <p14:section name="3.6 Enterprise State Spaces" id="{0e65b64f-1a79-854c-ea0a-d2b3c9f9ed87}">
           <p14:sldIdLst>
             <p14:sldId id="268"/>
           </p14:sldIdLst>
         </p14:section>
-        <p14:section name="3.7 Deterministic and Stochastic Models" id="{c387cb9b-80fe-b0df-c994-a86bdaf8108f}">
+        <p14:section name="3.7 Deterministic and Stochastic Models" id="{c61fd81c-5982-8095-64e9-451947c7d4ab}">
           <p14:sldIdLst>
             <p14:sldId id="269"/>
           </p14:sldIdLst>
         </p14:section>
-        <p14:section name="Worked Example 3.1" id="{1c4b2775-5f5c-0fd6-1719-10aee2c0a656}">
+        <p14:section name="Worked Example 3.1" id="{b4d5da91-2dea-eeb4-b87e-335eee783147}">
           <p14:sldIdLst>
             <p14:sldId id="270"/>
             <p14:sldId id="271"/>
@@ -182,12 +182,12 @@
             <p14:sldId id="273"/>
           </p14:sldIdLst>
         </p14:section>
-        <p14:section name="AXIOM Lab 1.3" id="{566be247-ed0c-b5b7-e637-871cd2eabc29}">
+        <p14:section name="AXIOM Lab 1.3" id="{292a86e9-bc45-df2a-cc7c-d0e6c06078bb}">
           <p14:sldIdLst>
             <p14:sldId id="274"/>
           </p14:sldIdLst>
         </p14:section>
-        <p14:section name="Close" id="{d60fb5a5-e4fc-8a00-fe26-65af69e021bb}">
+        <p14:section name="Close" id="{263f137b-7038-fc2e-052e-a8d5992cff78}">
           <p14:sldIdLst>
             <p14:sldId id="275"/>
             <p14:sldId id="276"/>
